--- a/DONaid/presentation/DONaid Project Presentation.pptx
+++ b/DONaid/presentation/DONaid Project Presentation.pptx
@@ -5,10 +5,10 @@
     <p:sldMasterId id="2147483648" r:id="rId4"/>
   </p:sldMasterIdLst>
   <p:notesMasterIdLst>
-    <p:notesMasterId r:id="rId34"/>
+    <p:notesMasterId r:id="rId35"/>
   </p:notesMasterIdLst>
   <p:handoutMasterIdLst>
-    <p:handoutMasterId r:id="rId35"/>
+    <p:handoutMasterId r:id="rId36"/>
   </p:handoutMasterIdLst>
   <p:sldIdLst>
     <p:sldId id="340" r:id="rId5"/>
@@ -38,8 +38,9 @@
     <p:sldId id="379" r:id="rId29"/>
     <p:sldId id="380" r:id="rId30"/>
     <p:sldId id="354" r:id="rId31"/>
-    <p:sldId id="360" r:id="rId32"/>
-    <p:sldId id="355" r:id="rId33"/>
+    <p:sldId id="382" r:id="rId32"/>
+    <p:sldId id="360" r:id="rId33"/>
+    <p:sldId id="355" r:id="rId34"/>
   </p:sldIdLst>
   <p:sldSz cx="12192000" cy="6858000"/>
   <p:notesSz cx="6858000" cy="9144000"/>
@@ -158,7 +159,7 @@
 <file path=ppt/revisionInfo.xml><?xml version="1.0" encoding="utf-8"?>
 <p1510:revInfo xmlns:a="http://schemas.openxmlformats.org/drawingml/2006/main" xmlns:r="http://schemas.openxmlformats.org/officeDocument/2006/relationships" xmlns:p1510="http://schemas.microsoft.com/office/powerpoint/2015/10/main">
   <p1510:revLst>
-    <p1510:client id="{6A9883EC-4E63-4ED0-87EE-A6202BBDEA42}" v="156" dt="2026-03-29T02:58:08.280"/>
+    <p1510:client id="{6A9883EC-4E63-4ED0-87EE-A6202BBDEA42}" v="158" dt="2026-03-29T03:38:36.761"/>
   </p1510:revLst>
 </p1510:revInfo>
 </file>
@@ -168,7 +169,7 @@
   <pc:docChgLst>
     <pc:chgData name="Justina Bosco" userId="34d2248b7b366c5d" providerId="LiveId" clId="{1F79D049-B36B-4B72-9C02-E53242B45241}"/>
     <pc:docChg chg="undo custSel addSld delSld modSld sldOrd">
-      <pc:chgData name="Justina Bosco" userId="34d2248b7b366c5d" providerId="LiveId" clId="{1F79D049-B36B-4B72-9C02-E53242B45241}" dt="2026-03-29T02:58:32.154" v="3387" actId="207"/>
+      <pc:chgData name="Justina Bosco" userId="34d2248b7b366c5d" providerId="LiveId" clId="{1F79D049-B36B-4B72-9C02-E53242B45241}" dt="2026-03-29T03:38:43.097" v="3394" actId="47"/>
       <pc:docMkLst>
         <pc:docMk/>
       </pc:docMkLst>
@@ -655,13 +656,13 @@
         </pc:picChg>
       </pc:sldChg>
       <pc:sldChg chg="modSp add mod">
-        <pc:chgData name="Justina Bosco" userId="34d2248b7b366c5d" providerId="LiveId" clId="{1F79D049-B36B-4B72-9C02-E53242B45241}" dt="2026-03-28T07:57:27.880" v="292" actId="20577"/>
+        <pc:chgData name="Justina Bosco" userId="34d2248b7b366c5d" providerId="LiveId" clId="{1F79D049-B36B-4B72-9C02-E53242B45241}" dt="2026-03-29T03:24:26.426" v="3391" actId="20577"/>
         <pc:sldMkLst>
           <pc:docMk/>
           <pc:sldMk cId="753831603" sldId="360"/>
         </pc:sldMkLst>
         <pc:spChg chg="mod">
-          <ac:chgData name="Justina Bosco" userId="34d2248b7b366c5d" providerId="LiveId" clId="{1F79D049-B36B-4B72-9C02-E53242B45241}" dt="2026-03-28T07:57:27.880" v="292" actId="20577"/>
+          <ac:chgData name="Justina Bosco" userId="34d2248b7b366c5d" providerId="LiveId" clId="{1F79D049-B36B-4B72-9C02-E53242B45241}" dt="2026-03-29T03:24:26.426" v="3391" actId="20577"/>
           <ac:spMkLst>
             <pc:docMk/>
             <pc:sldMk cId="753831603" sldId="360"/>
@@ -1379,6 +1380,20 @@
           </ac:picMkLst>
         </pc:picChg>
       </pc:sldChg>
+      <pc:sldChg chg="add del">
+        <pc:chgData name="Justina Bosco" userId="34d2248b7b366c5d" providerId="LiveId" clId="{1F79D049-B36B-4B72-9C02-E53242B45241}" dt="2026-03-29T03:38:43.097" v="3394" actId="47"/>
+        <pc:sldMkLst>
+          <pc:docMk/>
+          <pc:sldMk cId="1048079537" sldId="381"/>
+        </pc:sldMkLst>
+      </pc:sldChg>
+      <pc:sldChg chg="add">
+        <pc:chgData name="Justina Bosco" userId="34d2248b7b366c5d" providerId="LiveId" clId="{1F79D049-B36B-4B72-9C02-E53242B45241}" dt="2026-03-29T03:38:36.755" v="3393"/>
+        <pc:sldMkLst>
+          <pc:docMk/>
+          <pc:sldMk cId="2075571220" sldId="382"/>
+        </pc:sldMkLst>
+      </pc:sldChg>
     </pc:docChg>
   </pc:docChgLst>
 </pc:chgInfo>
@@ -4148,7 +4163,7 @@
           <a:p>
             <a:fld id="{17732C3C-A191-48C2-A7E8-9C96AF841A7A}" type="slidenum">
               <a:rPr lang="en-US" smtClean="0"/>
-              <a:t>28</a:t>
+              <a:t>29</a:t>
             </a:fld>
             <a:endParaRPr lang="en-US" dirty="0"/>
           </a:p>
@@ -4232,7 +4247,7 @@
           <a:p>
             <a:fld id="{17732C3C-A191-48C2-A7E8-9C96AF841A7A}" type="slidenum">
               <a:rPr lang="en-US" smtClean="0"/>
-              <a:t>29</a:t>
+              <a:t>30</a:t>
             </a:fld>
             <a:endParaRPr lang="en-US" dirty="0"/>
           </a:p>
@@ -15095,6 +15110,233 @@
   <p:cSld>
     <p:spTree>
       <p:nvGrpSpPr>
+        <p:cNvPr id="1" name=""/>
+        <p:cNvGrpSpPr/>
+        <p:nvPr/>
+      </p:nvGrpSpPr>
+      <p:grpSpPr>
+        <a:xfrm>
+          <a:off x="0" y="0"/>
+          <a:ext cx="0" cy="0"/>
+          <a:chOff x="0" y="0"/>
+          <a:chExt cx="0" cy="0"/>
+        </a:xfrm>
+      </p:grpSpPr>
+      <p:sp>
+        <p:nvSpPr>
+          <p:cNvPr id="2" name="Title 1">
+            <a:extLst>
+              <a:ext uri="{FF2B5EF4-FFF2-40B4-BE49-F238E27FC236}">
+                <a16:creationId xmlns:a16="http://schemas.microsoft.com/office/drawing/2014/main" id="{53053D5F-CC32-3948-3E87-B0434CD7F4B9}"/>
+              </a:ext>
+            </a:extLst>
+          </p:cNvPr>
+          <p:cNvSpPr>
+            <a:spLocks noGrp="1"/>
+          </p:cNvSpPr>
+          <p:nvPr>
+            <p:ph type="title"/>
+          </p:nvPr>
+        </p:nvSpPr>
+        <p:spPr/>
+        <p:txBody>
+          <a:bodyPr/>
+          <a:lstStyle/>
+          <a:p>
+            <a:r>
+              <a:rPr lang="en-NZ" dirty="0"/>
+              <a:t>Future Improvements</a:t>
+            </a:r>
+          </a:p>
+        </p:txBody>
+      </p:sp>
+      <p:graphicFrame>
+        <p:nvGraphicFramePr>
+          <p:cNvPr id="4" name="Table Placeholder 3">
+            <a:extLst>
+              <a:ext uri="{FF2B5EF4-FFF2-40B4-BE49-F238E27FC236}">
+                <a16:creationId xmlns:a16="http://schemas.microsoft.com/office/drawing/2014/main" id="{75AD99A6-1BD2-A28A-1990-ADB3D798B49C}"/>
+              </a:ext>
+            </a:extLst>
+          </p:cNvPr>
+          <p:cNvGraphicFramePr>
+            <a:graphicFrameLocks noGrp="1"/>
+          </p:cNvGraphicFramePr>
+          <p:nvPr>
+            <p:ph type="tbl" sz="quarter" idx="10"/>
+          </p:nvPr>
+        </p:nvGraphicFramePr>
+        <p:xfrm>
+          <a:off x="838200" y="1781037"/>
+          <a:ext cx="10515600" cy="4564131"/>
+        </p:xfrm>
+        <a:graphic>
+          <a:graphicData uri="http://schemas.openxmlformats.org/drawingml/2006/table">
+            <a:tbl>
+              <a:tblPr firstRow="1" bandRow="1">
+                <a:tableStyleId>{8A107856-5554-42FB-B03E-39F5DBC370BA}</a:tableStyleId>
+              </a:tblPr>
+              <a:tblGrid>
+                <a:gridCol w="5257800">
+                  <a:extLst>
+                    <a:ext uri="{9D8B030D-6E8A-4147-A177-3AD203B41FA5}">
+                      <a16:colId xmlns:a16="http://schemas.microsoft.com/office/drawing/2014/main" val="3965691341"/>
+                    </a:ext>
+                  </a:extLst>
+                </a:gridCol>
+                <a:gridCol w="5257800">
+                  <a:extLst>
+                    <a:ext uri="{9D8B030D-6E8A-4147-A177-3AD203B41FA5}">
+                      <a16:colId xmlns:a16="http://schemas.microsoft.com/office/drawing/2014/main" val="4247906539"/>
+                    </a:ext>
+                  </a:extLst>
+                </a:gridCol>
+              </a:tblGrid>
+              <a:tr h="1521377">
+                <a:tc>
+                  <a:txBody>
+                    <a:bodyPr/>
+                    <a:lstStyle/>
+                    <a:p>
+                      <a:r>
+                        <a:rPr lang="en-NZ" sz="2400" b="1" dirty="0">
+                          <a:solidFill>
+                            <a:schemeClr val="tx2"/>
+                          </a:solidFill>
+                        </a:rPr>
+                        <a:t>Email Notification</a:t>
+                      </a:r>
+                    </a:p>
+                  </a:txBody>
+                  <a:tcPr/>
+                </a:tc>
+                <a:tc>
+                  <a:txBody>
+                    <a:bodyPr/>
+                    <a:lstStyle/>
+                    <a:p>
+                      <a:r>
+                        <a:rPr lang="en-NZ" sz="2400" b="1" dirty="0">
+                          <a:solidFill>
+                            <a:schemeClr val="tx2"/>
+                          </a:solidFill>
+                        </a:rPr>
+                        <a:t>Future enhancement will enable email notifications to donors when any user is interested in their item</a:t>
+                      </a:r>
+                    </a:p>
+                  </a:txBody>
+                  <a:tcPr/>
+                </a:tc>
+                <a:extLst>
+                  <a:ext uri="{0D108BD9-81ED-4DB2-BD59-A6C34878D82A}">
+                    <a16:rowId xmlns:a16="http://schemas.microsoft.com/office/drawing/2014/main" val="3373151280"/>
+                  </a:ext>
+                </a:extLst>
+              </a:tr>
+              <a:tr h="1521377">
+                <a:tc>
+                  <a:txBody>
+                    <a:bodyPr/>
+                    <a:lstStyle/>
+                    <a:p>
+                      <a:r>
+                        <a:rPr lang="en-NZ" sz="2400" b="1" dirty="0">
+                          <a:solidFill>
+                            <a:schemeClr val="tx2"/>
+                          </a:solidFill>
+                        </a:rPr>
+                        <a:t>Location</a:t>
+                      </a:r>
+                    </a:p>
+                  </a:txBody>
+                  <a:tcPr/>
+                </a:tc>
+                <a:tc>
+                  <a:txBody>
+                    <a:bodyPr/>
+                    <a:lstStyle/>
+                    <a:p>
+                      <a:r>
+                        <a:rPr lang="en-NZ" sz="2400" b="1" dirty="0">
+                          <a:solidFill>
+                            <a:schemeClr val="tx2"/>
+                          </a:solidFill>
+                        </a:rPr>
+                        <a:t>Geographic Information System (GIS) functionality can help users locate the donor</a:t>
+                      </a:r>
+                    </a:p>
+                  </a:txBody>
+                  <a:tcPr/>
+                </a:tc>
+                <a:extLst>
+                  <a:ext uri="{0D108BD9-81ED-4DB2-BD59-A6C34878D82A}">
+                    <a16:rowId xmlns:a16="http://schemas.microsoft.com/office/drawing/2014/main" val="897852623"/>
+                  </a:ext>
+                </a:extLst>
+              </a:tr>
+              <a:tr h="1521377">
+                <a:tc>
+                  <a:txBody>
+                    <a:bodyPr/>
+                    <a:lstStyle/>
+                    <a:p>
+                      <a:r>
+                        <a:rPr lang="en-NZ" sz="2400" b="1" dirty="0">
+                          <a:solidFill>
+                            <a:schemeClr val="tx2"/>
+                          </a:solidFill>
+                        </a:rPr>
+                        <a:t>Password Reset</a:t>
+                      </a:r>
+                    </a:p>
+                  </a:txBody>
+                  <a:tcPr/>
+                </a:tc>
+                <a:tc>
+                  <a:txBody>
+                    <a:bodyPr/>
+                    <a:lstStyle/>
+                    <a:p>
+                      <a:r>
+                        <a:rPr lang="en-NZ" sz="2400" b="1" dirty="0">
+                          <a:solidFill>
+                            <a:schemeClr val="tx2"/>
+                          </a:solidFill>
+                        </a:rPr>
+                        <a:t>Very essential, users will be able to reset their password</a:t>
+                      </a:r>
+                    </a:p>
+                  </a:txBody>
+                  <a:tcPr/>
+                </a:tc>
+                <a:extLst>
+                  <a:ext uri="{0D108BD9-81ED-4DB2-BD59-A6C34878D82A}">
+                    <a16:rowId xmlns:a16="http://schemas.microsoft.com/office/drawing/2014/main" val="1394749626"/>
+                  </a:ext>
+                </a:extLst>
+              </a:tr>
+            </a:tbl>
+          </a:graphicData>
+        </a:graphic>
+      </p:graphicFrame>
+    </p:spTree>
+    <p:extLst>
+      <p:ext uri="{BB962C8B-B14F-4D97-AF65-F5344CB8AC3E}">
+        <p14:creationId xmlns:p14="http://schemas.microsoft.com/office/powerpoint/2010/main" val="2075571220"/>
+      </p:ext>
+    </p:extLst>
+  </p:cSld>
+  <p:clrMapOvr>
+    <a:masterClrMapping/>
+  </p:clrMapOvr>
+</p:sld>
+</file>
+
+<file path=ppt/slides/slide29.xml><?xml version="1.0" encoding="utf-8"?>
+<p:sld xmlns:a="http://schemas.openxmlformats.org/drawingml/2006/main" xmlns:r="http://schemas.openxmlformats.org/officeDocument/2006/relationships" xmlns:p="http://schemas.openxmlformats.org/presentationml/2006/main">
+  <p:cSld>
+    <p:spTree>
+      <p:nvGrpSpPr>
         <p:cNvPr id="1" name="">
           <a:extLst>
             <a:ext uri="{FF2B5EF4-FFF2-40B4-BE49-F238E27FC236}">
@@ -15142,7 +15384,7 @@
             <a:pPr lvl="0"/>
             <a:r>
               <a:rPr lang="en-NZ" noProof="0" dirty="0"/>
-              <a:t>Special thanks to our trainer for guidance throughout the project</a:t>
+              <a:t>Special thanks to our trainer for his guidance throughout the project</a:t>
             </a:r>
             <a:endParaRPr lang="en-US" noProof="0" dirty="0"/>
           </a:p>
@@ -15152,121 +15394,6 @@
     <p:extLst>
       <p:ext uri="{BB962C8B-B14F-4D97-AF65-F5344CB8AC3E}">
         <p14:creationId xmlns:p14="http://schemas.microsoft.com/office/powerpoint/2010/main" val="753831603"/>
-      </p:ext>
-    </p:extLst>
-  </p:cSld>
-  <p:clrMapOvr>
-    <a:masterClrMapping/>
-  </p:clrMapOvr>
-</p:sld>
-</file>
-
-<file path=ppt/slides/slide29.xml><?xml version="1.0" encoding="utf-8"?>
-<p:sld xmlns:a="http://schemas.openxmlformats.org/drawingml/2006/main" xmlns:r="http://schemas.openxmlformats.org/officeDocument/2006/relationships" xmlns:p="http://schemas.openxmlformats.org/presentationml/2006/main">
-  <p:cSld>
-    <p:spTree>
-      <p:nvGrpSpPr>
-        <p:cNvPr id="1" name=""/>
-        <p:cNvGrpSpPr/>
-        <p:nvPr/>
-      </p:nvGrpSpPr>
-      <p:grpSpPr>
-        <a:xfrm>
-          <a:off x="0" y="0"/>
-          <a:ext cx="0" cy="0"/>
-          <a:chOff x="0" y="0"/>
-          <a:chExt cx="0" cy="0"/>
-        </a:xfrm>
-      </p:grpSpPr>
-      <p:sp>
-        <p:nvSpPr>
-          <p:cNvPr id="2" name="Title 1">
-            <a:extLst>
-              <a:ext uri="{FF2B5EF4-FFF2-40B4-BE49-F238E27FC236}">
-                <a16:creationId xmlns:a16="http://schemas.microsoft.com/office/drawing/2014/main" id="{53005011-03FC-652B-2538-4EAE68ABF80D}"/>
-              </a:ext>
-            </a:extLst>
-          </p:cNvPr>
-          <p:cNvSpPr>
-            <a:spLocks noGrp="1"/>
-          </p:cNvSpPr>
-          <p:nvPr>
-            <p:ph type="title"/>
-          </p:nvPr>
-        </p:nvSpPr>
-        <p:spPr>
-          <a:xfrm>
-            <a:off x="770660" y="1017858"/>
-            <a:ext cx="10650681" cy="2719255"/>
-          </a:xfrm>
-        </p:spPr>
-        <p:txBody>
-          <a:bodyPr/>
-          <a:lstStyle/>
-          <a:p>
-            <a:pPr lvl="0"/>
-            <a:r>
-              <a:rPr lang="en-US" dirty="0"/>
-              <a:t>Thank You</a:t>
-            </a:r>
-            <a:endParaRPr lang="en-US" noProof="0" dirty="0"/>
-          </a:p>
-        </p:txBody>
-      </p:sp>
-      <p:sp>
-        <p:nvSpPr>
-          <p:cNvPr id="3" name="Text Placeholder 2">
-            <a:extLst>
-              <a:ext uri="{FF2B5EF4-FFF2-40B4-BE49-F238E27FC236}">
-                <a16:creationId xmlns:a16="http://schemas.microsoft.com/office/drawing/2014/main" id="{411A2349-EF0B-F33D-13F9-826241461648}"/>
-              </a:ext>
-            </a:extLst>
-          </p:cNvPr>
-          <p:cNvSpPr>
-            <a:spLocks noGrp="1"/>
-          </p:cNvSpPr>
-          <p:nvPr>
-            <p:ph type="body" sz="quarter" idx="14"/>
-          </p:nvPr>
-        </p:nvSpPr>
-        <p:spPr>
-          <a:xfrm>
-            <a:off x="770660" y="4042066"/>
-            <a:ext cx="10650681" cy="2296843"/>
-          </a:xfrm>
-        </p:spPr>
-        <p:txBody>
-          <a:bodyPr/>
-          <a:lstStyle/>
-          <a:p>
-            <a:pPr lvl="0"/>
-            <a:r>
-              <a:rPr lang="en-US" dirty="0"/>
-              <a:t>Justina Bosco</a:t>
-            </a:r>
-            <a:endParaRPr lang="en-US" noProof="0" dirty="0"/>
-          </a:p>
-          <a:p>
-            <a:pPr lvl="0"/>
-            <a:r>
-              <a:rPr lang="en-US" noProof="0" dirty="0"/>
-              <a:t>justinabosconz@gmail.com</a:t>
-            </a:r>
-          </a:p>
-          <a:p>
-            <a:pPr lvl="0"/>
-            <a:r>
-              <a:rPr lang="en-US" dirty="0"/>
-              <a:t>https://www.linkedin.com/in/justina-bosco-514b86188/</a:t>
-            </a:r>
-            <a:endParaRPr lang="en-US" noProof="0" dirty="0"/>
-          </a:p>
-        </p:txBody>
-      </p:sp>
-    </p:spTree>
-    <p:extLst>
-      <p:ext uri="{BB962C8B-B14F-4D97-AF65-F5344CB8AC3E}">
-        <p14:creationId xmlns:p14="http://schemas.microsoft.com/office/powerpoint/2010/main" val="3663657925"/>
       </p:ext>
     </p:extLst>
   </p:cSld>
@@ -15369,6 +15496,121 @@
     <p:extLst>
       <p:ext uri="{BB962C8B-B14F-4D97-AF65-F5344CB8AC3E}">
         <p14:creationId xmlns:p14="http://schemas.microsoft.com/office/powerpoint/2010/main" val="909924710"/>
+      </p:ext>
+    </p:extLst>
+  </p:cSld>
+  <p:clrMapOvr>
+    <a:masterClrMapping/>
+  </p:clrMapOvr>
+</p:sld>
+</file>
+
+<file path=ppt/slides/slide30.xml><?xml version="1.0" encoding="utf-8"?>
+<p:sld xmlns:a="http://schemas.openxmlformats.org/drawingml/2006/main" xmlns:r="http://schemas.openxmlformats.org/officeDocument/2006/relationships" xmlns:p="http://schemas.openxmlformats.org/presentationml/2006/main">
+  <p:cSld>
+    <p:spTree>
+      <p:nvGrpSpPr>
+        <p:cNvPr id="1" name=""/>
+        <p:cNvGrpSpPr/>
+        <p:nvPr/>
+      </p:nvGrpSpPr>
+      <p:grpSpPr>
+        <a:xfrm>
+          <a:off x="0" y="0"/>
+          <a:ext cx="0" cy="0"/>
+          <a:chOff x="0" y="0"/>
+          <a:chExt cx="0" cy="0"/>
+        </a:xfrm>
+      </p:grpSpPr>
+      <p:sp>
+        <p:nvSpPr>
+          <p:cNvPr id="2" name="Title 1">
+            <a:extLst>
+              <a:ext uri="{FF2B5EF4-FFF2-40B4-BE49-F238E27FC236}">
+                <a16:creationId xmlns:a16="http://schemas.microsoft.com/office/drawing/2014/main" id="{53005011-03FC-652B-2538-4EAE68ABF80D}"/>
+              </a:ext>
+            </a:extLst>
+          </p:cNvPr>
+          <p:cNvSpPr>
+            <a:spLocks noGrp="1"/>
+          </p:cNvSpPr>
+          <p:nvPr>
+            <p:ph type="title"/>
+          </p:nvPr>
+        </p:nvSpPr>
+        <p:spPr>
+          <a:xfrm>
+            <a:off x="770660" y="1017858"/>
+            <a:ext cx="10650681" cy="2719255"/>
+          </a:xfrm>
+        </p:spPr>
+        <p:txBody>
+          <a:bodyPr/>
+          <a:lstStyle/>
+          <a:p>
+            <a:pPr lvl="0"/>
+            <a:r>
+              <a:rPr lang="en-US" dirty="0"/>
+              <a:t>Thank You</a:t>
+            </a:r>
+            <a:endParaRPr lang="en-US" noProof="0" dirty="0"/>
+          </a:p>
+        </p:txBody>
+      </p:sp>
+      <p:sp>
+        <p:nvSpPr>
+          <p:cNvPr id="3" name="Text Placeholder 2">
+            <a:extLst>
+              <a:ext uri="{FF2B5EF4-FFF2-40B4-BE49-F238E27FC236}">
+                <a16:creationId xmlns:a16="http://schemas.microsoft.com/office/drawing/2014/main" id="{411A2349-EF0B-F33D-13F9-826241461648}"/>
+              </a:ext>
+            </a:extLst>
+          </p:cNvPr>
+          <p:cNvSpPr>
+            <a:spLocks noGrp="1"/>
+          </p:cNvSpPr>
+          <p:nvPr>
+            <p:ph type="body" sz="quarter" idx="14"/>
+          </p:nvPr>
+        </p:nvSpPr>
+        <p:spPr>
+          <a:xfrm>
+            <a:off x="770660" y="4042066"/>
+            <a:ext cx="10650681" cy="2296843"/>
+          </a:xfrm>
+        </p:spPr>
+        <p:txBody>
+          <a:bodyPr/>
+          <a:lstStyle/>
+          <a:p>
+            <a:pPr lvl="0"/>
+            <a:r>
+              <a:rPr lang="en-US" dirty="0"/>
+              <a:t>Justina Bosco</a:t>
+            </a:r>
+            <a:endParaRPr lang="en-US" noProof="0" dirty="0"/>
+          </a:p>
+          <a:p>
+            <a:pPr lvl="0"/>
+            <a:r>
+              <a:rPr lang="en-US" noProof="0" dirty="0"/>
+              <a:t>justinabosconz@gmail.com</a:t>
+            </a:r>
+          </a:p>
+          <a:p>
+            <a:pPr lvl="0"/>
+            <a:r>
+              <a:rPr lang="en-US" dirty="0"/>
+              <a:t>https://www.linkedin.com/in/justina-bosco-514b86188/</a:t>
+            </a:r>
+            <a:endParaRPr lang="en-US" noProof="0" dirty="0"/>
+          </a:p>
+        </p:txBody>
+      </p:sp>
+    </p:spTree>
+    <p:extLst>
+      <p:ext uri="{BB962C8B-B14F-4D97-AF65-F5344CB8AC3E}">
+        <p14:creationId xmlns:p14="http://schemas.microsoft.com/office/powerpoint/2010/main" val="3663657925"/>
       </p:ext>
     </p:extLst>
   </p:cSld>
